--- a/2026_Б_ПІ_ПЗПІ_22_5_Бєлошапка_М_Ю.pptx
+++ b/2026_Б_ПІ_ПЗПІ_22_5_Бєлошапка_М_Ю.pptx
@@ -1569,6 +1569,28 @@
               <a:buNone/>
             </a:pPr>
             <a:r>
+              <a:rPr lang="ru-RU" sz="3000" b="1" dirty="0">
+                <a:solidFill>
+                  <a:srgbClr val="FFFFFF"/>
+                </a:solidFill>
+                <a:latin typeface="Calibri" pitchFamily="34" charset="0"/>
+                <a:ea typeface="Calibri" pitchFamily="34" charset="-122"/>
+                <a:cs typeface="Calibri" pitchFamily="34" charset="-120"/>
+              </a:rPr>
+              <a:t>ф</a:t>
+            </a:r>
+            <a:r>
+              <a:rPr lang="en-US" sz="3000" b="1" dirty="0" err="1">
+                <a:solidFill>
+                  <a:srgbClr val="FFFFFF"/>
+                </a:solidFill>
+                <a:latin typeface="Calibri" pitchFamily="34" charset="0"/>
+                <a:ea typeface="Calibri" pitchFamily="34" charset="-122"/>
+                <a:cs typeface="Calibri" pitchFamily="34" charset="-120"/>
+              </a:rPr>
+              <a:t>ітнес</a:t>
+            </a:r>
+            <a:r>
               <a:rPr lang="en-US" sz="3000" b="1" dirty="0">
                 <a:solidFill>
                   <a:srgbClr val="FFFFFF"/>
@@ -1577,7 +1599,18 @@
                 <a:ea typeface="Calibri" pitchFamily="34" charset="-122"/>
                 <a:cs typeface="Calibri" pitchFamily="34" charset="-120"/>
               </a:rPr>
-              <a:t>фітнес-менеджменту</a:t>
+              <a:t> </a:t>
+            </a:r>
+            <a:r>
+              <a:rPr lang="en-US" sz="3000" b="1" dirty="0" err="1">
+                <a:solidFill>
+                  <a:srgbClr val="FFFFFF"/>
+                </a:solidFill>
+                <a:latin typeface="Calibri" pitchFamily="34" charset="0"/>
+                <a:ea typeface="Calibri" pitchFamily="34" charset="-122"/>
+                <a:cs typeface="Calibri" pitchFamily="34" charset="-120"/>
+              </a:rPr>
+              <a:t>менеджменту</a:t>
             </a:r>
             <a:endParaRPr lang="en-US" sz="3000" dirty="0"/>
           </a:p>
@@ -1594,7 +1627,40 @@
                 <a:ea typeface="Calibri" pitchFamily="34" charset="-122"/>
                 <a:cs typeface="Calibri" pitchFamily="34" charset="-120"/>
               </a:rPr>
-              <a:t>з трекінгом активності та харчування</a:t>
+              <a:t>з </a:t>
+            </a:r>
+            <a:r>
+              <a:rPr lang="en-US" sz="3000" b="1" dirty="0" err="1">
+                <a:solidFill>
+                  <a:srgbClr val="FFFFFF"/>
+                </a:solidFill>
+                <a:latin typeface="Calibri" pitchFamily="34" charset="0"/>
+                <a:ea typeface="Calibri" pitchFamily="34" charset="-122"/>
+                <a:cs typeface="Calibri" pitchFamily="34" charset="-120"/>
+              </a:rPr>
+              <a:t>тре</a:t>
+            </a:r>
+            <a:r>
+              <a:rPr lang="ru-RU" sz="3000" b="1" dirty="0">
+                <a:solidFill>
+                  <a:srgbClr val="FFFFFF"/>
+                </a:solidFill>
+                <a:latin typeface="Calibri" pitchFamily="34" charset="0"/>
+                <a:ea typeface="Calibri" pitchFamily="34" charset="-122"/>
+                <a:cs typeface="Calibri" pitchFamily="34" charset="-120"/>
+              </a:rPr>
+              <a:t>н</a:t>
+            </a:r>
+            <a:r>
+              <a:rPr lang="en-US" sz="3000" b="1" dirty="0">
+                <a:solidFill>
+                  <a:srgbClr val="FFFFFF"/>
+                </a:solidFill>
+                <a:latin typeface="Calibri" pitchFamily="34" charset="0"/>
+                <a:ea typeface="Calibri" pitchFamily="34" charset="-122"/>
+                <a:cs typeface="Calibri" pitchFamily="34" charset="-120"/>
+              </a:rPr>
+              <a:t>інгом активності та харчування</a:t>
             </a:r>
             <a:endParaRPr lang="en-US" sz="3000" dirty="0"/>
           </a:p>
@@ -1699,7 +1765,7 @@
         </p:blipFill>
         <p:spPr>
           <a:xfrm>
-            <a:off x="182880" y="185722"/>
+            <a:off x="116959" y="194866"/>
             <a:ext cx="1685925" cy="993854"/>
           </a:xfrm>
           <a:prstGeom prst="rect">
